--- a/docs/generator/output/E6_系統說明/系統說明簡報.pptx
+++ b/docs/generator/output/E6_系統說明/系統說明簡報.pptx
@@ -3072,7 +3072,7 @@
                 <a:ea typeface="Microsoft JhengHei" pitchFamily="34" charset="-122"/>
                 <a:cs typeface="Microsoft JhengHei" pitchFamily="34" charset="-120"/>
               </a:rPr>
-              <a:t>HRMS 開發團隊　|　2026-03-06　|　v1.0</a:t>
+              <a:t>HRMS 開發團隊　|　2026-03-17　|　v1.0</a:t>
             </a:r>
             <a:endParaRPr lang="en-US" sz="1200" dirty="0"/>
           </a:p>
@@ -4354,7 +4354,7 @@
       </p:sp>
       <p:pic>
         <p:nvPicPr>
-          <p:cNvPr id="4" name="Image 0" descr="D:\git\hr-system2\hr-sytsem-2\knowledge\diagrams\01_員工入職流程.png">    </p:cNvPr>
+          <p:cNvPr id="4" name="Image 0" descr="D:\java\hr-sytsem-2\knowledge\diagrams\01_員工入職流程.png">    </p:cNvPr>
           <p:cNvPicPr>
             <a:picLocks noChangeAspect="1"/>
           </p:cNvPicPr>
@@ -4500,7 +4500,7 @@
       </p:sp>
       <p:pic>
         <p:nvPicPr>
-          <p:cNvPr id="4" name="Image 0" descr="D:\git\hr-system2\hr-sytsem-2\knowledge\diagrams\01_薪資SAGA補償流程.png">    </p:cNvPr>
+          <p:cNvPr id="4" name="Image 0" descr="D:\java\hr-sytsem-2\knowledge\diagrams\01_薪資SAGA補償流程.png">    </p:cNvPr>
           <p:cNvPicPr>
             <a:picLocks noChangeAspect="1"/>
           </p:cNvPicPr>
@@ -5421,7 +5421,7 @@
       </p:sp>
       <p:pic>
         <p:nvPicPr>
-          <p:cNvPr id="4" name="Image 0" descr="D:\git\hr-system2\hr-sytsem-2\knowledge\diagrams\06_CICD_Pipeline.png">    </p:cNvPr>
+          <p:cNvPr id="4" name="Image 0" descr="D:\java\hr-sytsem-2\knowledge\diagrams\06_CICD_Pipeline.png">    </p:cNvPr>
           <p:cNvPicPr>
             <a:picLocks noChangeAspect="1"/>
           </p:cNvPicPr>
@@ -11439,7 +11439,7 @@
       </p:sp>
       <p:pic>
         <p:nvPicPr>
-          <p:cNvPr id="4" name="Image 0" descr="D:\git\hr-system2\hr-sytsem-2\knowledge\diagrams\00_系統架構拓撲圖.png">    </p:cNvPr>
+          <p:cNvPr id="4" name="Image 0" descr="D:\java\hr-sytsem-2\knowledge\diagrams\00_系統架構拓撲圖.png">    </p:cNvPr>
           <p:cNvPicPr>
             <a:picLocks noChangeAspect="1"/>
           </p:cNvPicPr>

--- a/docs/generator/output/E6_系統說明/系統說明簡報.pptx
+++ b/docs/generator/output/E6_系統說明/系統說明簡報.pptx
@@ -3072,7 +3072,7 @@
                 <a:ea typeface="Microsoft JhengHei" pitchFamily="34" charset="-122"/>
                 <a:cs typeface="Microsoft JhengHei" pitchFamily="34" charset="-120"/>
               </a:rPr>
-              <a:t>HRMS 開發團隊　|　2026-03-17　|　v1.0</a:t>
+              <a:t>HRMS 開發團隊　|　2026-03-18　|　v1.0</a:t>
             </a:r>
             <a:endParaRPr lang="en-US" sz="1200" dirty="0"/>
           </a:p>
